--- a/Week_3/Workshop_3.pptx
+++ b/Week_3/Workshop_3.pptx
@@ -12192,11 +12192,11 @@
           <a:p>
             <a:r>
               <a:rPr lang="en-US" dirty="0"/>
-              <a:t>Session 5. (Sept 1</a:t>
+              <a:t>Session 5. (Sept 15</a:t>
             </a:r>
             <a:r>
               <a:rPr lang="en-US" baseline="30000" dirty="0"/>
-              <a:t>st</a:t>
+              <a:t>th</a:t>
             </a:r>
             <a:r>
               <a:rPr lang="en-US" dirty="0"/>
@@ -13280,7 +13280,7 @@
           <a:p>
             <a:r>
               <a:rPr lang="en-US" dirty="0"/>
-              <a:t>Week 3 data has the favorite colors and holidays of the people in week 1</a:t>
+              <a:t>Week 3 data has the favorite colors and holidays of the people in week 2</a:t>
             </a:r>
           </a:p>
           <a:p>
@@ -13477,7 +13477,7 @@
             <a:pPr lvl="1"/>
             <a:r>
               <a:rPr lang="en-US" dirty="0"/>
-              <a:t>Name</a:t>
+              <a:t>name</a:t>
             </a:r>
           </a:p>
           <a:p>
@@ -13524,15 +13524,19 @@
           <a:p>
             <a:pPr lvl="1"/>
             <a:r>
+              <a:rPr lang="en-US" dirty="0" err="1"/>
+              <a:t>has_diabetes</a:t>
+            </a:r>
+            <a:r>
               <a:rPr lang="en-US" dirty="0"/>
-              <a:t>Diabetes (yes/no)</a:t>
+              <a:t> (yes/no)</a:t>
             </a:r>
           </a:p>
           <a:p>
             <a:pPr lvl="1"/>
             <a:r>
               <a:rPr lang="en-US" dirty="0" err="1"/>
-              <a:t>Egfr</a:t>
+              <a:t>egfr</a:t>
             </a:r>
             <a:endParaRPr lang="en-US" dirty="0"/>
           </a:p>
@@ -13540,7 +13544,7 @@
             <a:pPr lvl="1"/>
             <a:r>
               <a:rPr lang="en-US" dirty="0"/>
-              <a:t>Took_glp1</a:t>
+              <a:t>took_GLP1</a:t>
             </a:r>
           </a:p>
           <a:p>
@@ -13680,8 +13684,8 @@
         <p:spPr>
           <a:solidFill>
             <a:schemeClr val="accent6">
-              <a:lumMod val="40000"/>
-              <a:lumOff val="60000"/>
+              <a:lumMod val="60000"/>
+              <a:lumOff val="40000"/>
             </a:schemeClr>
           </a:solidFill>
         </p:spPr>
@@ -13691,7 +13695,15 @@
           <a:p>
             <a:r>
               <a:rPr lang="en-US" dirty="0"/>
-              <a:t>Why should we match things across datasets?</a:t>
+              <a:t>Why should we match </a:t>
+            </a:r>
+            <a:r>
+              <a:rPr lang="en-US" dirty="0" err="1"/>
+              <a:t>obs</a:t>
+            </a:r>
+            <a:r>
+              <a:rPr lang="en-US" dirty="0"/>
+              <a:t> across datasets?</a:t>
             </a:r>
           </a:p>
         </p:txBody>
